--- a/duboko_ucenje_prezentacija.pptx
+++ b/duboko_ucenje_prezentacija.pptx
@@ -190,7 +190,7 @@
           <a:noFill/>
           <a:extLst>
             <a:ext uri="{909E8E84-426E-40dd-AFC4-6F175D3DCCD1}">
-              <a14:hiddenFill xmlns="" xmlns:a14="http://schemas.microsoft.com/office/drawing/2010/main">
+              <a14:hiddenFill xmlns:a14="http://schemas.microsoft.com/office/drawing/2010/main" xmlns="">
                 <a:solidFill>
                   <a:srgbClr val="FFFFFF"/>
                 </a:solidFill>
@@ -250,7 +250,7 @@
             </a:ln>
             <a:extLst>
               <a:ext uri="{91240B29-F687-4f45-9708-019B960494DF}">
-                <a14:hiddenLine xmlns="" xmlns:a14="http://schemas.microsoft.com/office/drawing/2010/main" w="9525">
+                <a14:hiddenLine xmlns:a14="http://schemas.microsoft.com/office/drawing/2010/main" xmlns="" w="9525">
                   <a:solidFill>
                     <a:srgbClr val="000000"/>
                   </a:solidFill>
@@ -340,7 +340,7 @@
             </a:ln>
             <a:extLst>
               <a:ext uri="{91240B29-F687-4f45-9708-019B960494DF}">
-                <a14:hiddenLine xmlns="" xmlns:a14="http://schemas.microsoft.com/office/drawing/2010/main" w="9525">
+                <a14:hiddenLine xmlns:a14="http://schemas.microsoft.com/office/drawing/2010/main" xmlns="" w="9525">
                   <a:solidFill>
                     <a:srgbClr val="000000"/>
                   </a:solidFill>
@@ -430,7 +430,7 @@
             </a:ln>
             <a:extLst>
               <a:ext uri="{91240B29-F687-4f45-9708-019B960494DF}">
-                <a14:hiddenLine xmlns="" xmlns:a14="http://schemas.microsoft.com/office/drawing/2010/main" w="9525">
+                <a14:hiddenLine xmlns:a14="http://schemas.microsoft.com/office/drawing/2010/main" xmlns="" w="9525">
                   <a:solidFill>
                     <a:srgbClr val="000000"/>
                   </a:solidFill>
@@ -464,7 +464,7 @@
             </a:ln>
             <a:extLst>
               <a:ext uri="{91240B29-F687-4f45-9708-019B960494DF}">
-                <a14:hiddenLine xmlns="" xmlns:a14="http://schemas.microsoft.com/office/drawing/2010/main" w="9525">
+                <a14:hiddenLine xmlns:a14="http://schemas.microsoft.com/office/drawing/2010/main" xmlns="" w="9525">
                   <a:solidFill>
                     <a:srgbClr val="000000"/>
                   </a:solidFill>
@@ -554,7 +554,7 @@
             </a:ln>
             <a:extLst>
               <a:ext uri="{91240B29-F687-4f45-9708-019B960494DF}">
-                <a14:hiddenLine xmlns="" xmlns:a14="http://schemas.microsoft.com/office/drawing/2010/main" w="9525">
+                <a14:hiddenLine xmlns:a14="http://schemas.microsoft.com/office/drawing/2010/main" xmlns="" w="9525">
                   <a:solidFill>
                     <a:srgbClr val="000000"/>
                   </a:solidFill>
@@ -616,7 +616,7 @@
             </a:ln>
             <a:extLst>
               <a:ext uri="{91240B29-F687-4f45-9708-019B960494DF}">
-                <a14:hiddenLine xmlns="" xmlns:a14="http://schemas.microsoft.com/office/drawing/2010/main" w="9525">
+                <a14:hiddenLine xmlns:a14="http://schemas.microsoft.com/office/drawing/2010/main" xmlns="" w="9525">
                   <a:solidFill>
                     <a:srgbClr val="000000"/>
                   </a:solidFill>
@@ -678,7 +678,7 @@
             </a:ln>
             <a:extLst>
               <a:ext uri="{91240B29-F687-4f45-9708-019B960494DF}">
-                <a14:hiddenLine xmlns="" xmlns:a14="http://schemas.microsoft.com/office/drawing/2010/main" w="9525">
+                <a14:hiddenLine xmlns:a14="http://schemas.microsoft.com/office/drawing/2010/main" xmlns="" w="9525">
                   <a:solidFill>
                     <a:srgbClr val="000000"/>
                   </a:solidFill>
@@ -768,7 +768,7 @@
             </a:ln>
             <a:extLst>
               <a:ext uri="{91240B29-F687-4f45-9708-019B960494DF}">
-                <a14:hiddenLine xmlns="" xmlns:a14="http://schemas.microsoft.com/office/drawing/2010/main" w="9525">
+                <a14:hiddenLine xmlns:a14="http://schemas.microsoft.com/office/drawing/2010/main" xmlns="" w="9525">
                   <a:solidFill>
                     <a:srgbClr val="000000"/>
                   </a:solidFill>
@@ -830,7 +830,7 @@
             </a:ln>
             <a:extLst>
               <a:ext uri="{91240B29-F687-4f45-9708-019B960494DF}">
-                <a14:hiddenLine xmlns="" xmlns:a14="http://schemas.microsoft.com/office/drawing/2010/main" w="9525">
+                <a14:hiddenLine xmlns:a14="http://schemas.microsoft.com/office/drawing/2010/main" xmlns="" w="9525">
                   <a:solidFill>
                     <a:srgbClr val="000000"/>
                   </a:solidFill>
@@ -892,7 +892,7 @@
             </a:ln>
             <a:extLst>
               <a:ext uri="{91240B29-F687-4f45-9708-019B960494DF}">
-                <a14:hiddenLine xmlns="" xmlns:a14="http://schemas.microsoft.com/office/drawing/2010/main" w="9525">
+                <a14:hiddenLine xmlns:a14="http://schemas.microsoft.com/office/drawing/2010/main" xmlns="" w="9525">
                   <a:solidFill>
                     <a:srgbClr val="000000"/>
                   </a:solidFill>
@@ -982,7 +982,7 @@
             </a:ln>
             <a:extLst>
               <a:ext uri="{91240B29-F687-4f45-9708-019B960494DF}">
-                <a14:hiddenLine xmlns="" xmlns:a14="http://schemas.microsoft.com/office/drawing/2010/main" w="9525">
+                <a14:hiddenLine xmlns:a14="http://schemas.microsoft.com/office/drawing/2010/main" xmlns="" w="9525">
                   <a:solidFill>
                     <a:srgbClr val="000000"/>
                   </a:solidFill>
@@ -1072,7 +1072,7 @@
             </a:ln>
             <a:extLst>
               <a:ext uri="{91240B29-F687-4f45-9708-019B960494DF}">
-                <a14:hiddenLine xmlns="" xmlns:a14="http://schemas.microsoft.com/office/drawing/2010/main" w="9525">
+                <a14:hiddenLine xmlns:a14="http://schemas.microsoft.com/office/drawing/2010/main" xmlns="" w="9525">
                   <a:solidFill>
                     <a:srgbClr val="000000"/>
                   </a:solidFill>
@@ -1134,7 +1134,7 @@
             </a:ln>
             <a:extLst>
               <a:ext uri="{91240B29-F687-4f45-9708-019B960494DF}">
-                <a14:hiddenLine xmlns="" xmlns:a14="http://schemas.microsoft.com/office/drawing/2010/main" w="9525">
+                <a14:hiddenLine xmlns:a14="http://schemas.microsoft.com/office/drawing/2010/main" xmlns="" w="9525">
                   <a:solidFill>
                     <a:srgbClr val="000000"/>
                   </a:solidFill>
@@ -1244,7 +1244,7 @@
             </a:ln>
             <a:extLst>
               <a:ext uri="{91240B29-F687-4f45-9708-019B960494DF}">
-                <a14:hiddenLine xmlns="" xmlns:a14="http://schemas.microsoft.com/office/drawing/2010/main" w="9525">
+                <a14:hiddenLine xmlns:a14="http://schemas.microsoft.com/office/drawing/2010/main" xmlns="" w="9525">
                   <a:solidFill>
                     <a:srgbClr val="000000"/>
                   </a:solidFill>
@@ -1306,7 +1306,7 @@
             </a:ln>
             <a:extLst>
               <a:ext uri="{91240B29-F687-4f45-9708-019B960494DF}">
-                <a14:hiddenLine xmlns="" xmlns:a14="http://schemas.microsoft.com/office/drawing/2010/main" w="9525">
+                <a14:hiddenLine xmlns:a14="http://schemas.microsoft.com/office/drawing/2010/main" xmlns="" w="9525">
                   <a:solidFill>
                     <a:srgbClr val="000000"/>
                   </a:solidFill>
@@ -1396,7 +1396,7 @@
             </a:ln>
             <a:extLst>
               <a:ext uri="{91240B29-F687-4f45-9708-019B960494DF}">
-                <a14:hiddenLine xmlns="" xmlns:a14="http://schemas.microsoft.com/office/drawing/2010/main" w="9525">
+                <a14:hiddenLine xmlns:a14="http://schemas.microsoft.com/office/drawing/2010/main" xmlns="" w="9525">
                   <a:solidFill>
                     <a:srgbClr val="000000"/>
                   </a:solidFill>
@@ -1486,7 +1486,7 @@
             </a:ln>
             <a:extLst>
               <a:ext uri="{91240B29-F687-4f45-9708-019B960494DF}">
-                <a14:hiddenLine xmlns="" xmlns:a14="http://schemas.microsoft.com/office/drawing/2010/main" w="9525">
+                <a14:hiddenLine xmlns:a14="http://schemas.microsoft.com/office/drawing/2010/main" xmlns="" w="9525">
                   <a:solidFill>
                     <a:srgbClr val="000000"/>
                   </a:solidFill>
@@ -1548,7 +1548,7 @@
             </a:ln>
             <a:extLst>
               <a:ext uri="{91240B29-F687-4f45-9708-019B960494DF}">
-                <a14:hiddenLine xmlns="" xmlns:a14="http://schemas.microsoft.com/office/drawing/2010/main" w="9525">
+                <a14:hiddenLine xmlns:a14="http://schemas.microsoft.com/office/drawing/2010/main" xmlns="" w="9525">
                   <a:solidFill>
                     <a:srgbClr val="000000"/>
                   </a:solidFill>
@@ -1638,7 +1638,7 @@
             </a:ln>
             <a:extLst>
               <a:ext uri="{91240B29-F687-4f45-9708-019B960494DF}">
-                <a14:hiddenLine xmlns="" xmlns:a14="http://schemas.microsoft.com/office/drawing/2010/main" w="9525">
+                <a14:hiddenLine xmlns:a14="http://schemas.microsoft.com/office/drawing/2010/main" xmlns="" w="9525">
                   <a:solidFill>
                     <a:srgbClr val="000000"/>
                   </a:solidFill>
@@ -1728,7 +1728,7 @@
             </a:ln>
             <a:extLst>
               <a:ext uri="{91240B29-F687-4f45-9708-019B960494DF}">
-                <a14:hiddenLine xmlns="" xmlns:a14="http://schemas.microsoft.com/office/drawing/2010/main" w="9525">
+                <a14:hiddenLine xmlns:a14="http://schemas.microsoft.com/office/drawing/2010/main" xmlns="" w="9525">
                   <a:solidFill>
                     <a:srgbClr val="000000"/>
                   </a:solidFill>
@@ -1784,7 +1784,7 @@
             </a:ln>
             <a:extLst>
               <a:ext uri="{91240B29-F687-4f45-9708-019B960494DF}">
-                <a14:hiddenLine xmlns="" xmlns:a14="http://schemas.microsoft.com/office/drawing/2010/main" w="9525">
+                <a14:hiddenLine xmlns:a14="http://schemas.microsoft.com/office/drawing/2010/main" xmlns="" w="9525">
                   <a:solidFill>
                     <a:srgbClr val="000000"/>
                   </a:solidFill>
@@ -1874,7 +1874,7 @@
             </a:ln>
             <a:extLst>
               <a:ext uri="{91240B29-F687-4f45-9708-019B960494DF}">
-                <a14:hiddenLine xmlns="" xmlns:a14="http://schemas.microsoft.com/office/drawing/2010/main" w="9525">
+                <a14:hiddenLine xmlns:a14="http://schemas.microsoft.com/office/drawing/2010/main" xmlns="" w="9525">
                   <a:solidFill>
                     <a:srgbClr val="000000"/>
                   </a:solidFill>
@@ -1930,7 +1930,7 @@
             </a:ln>
             <a:extLst>
               <a:ext uri="{91240B29-F687-4f45-9708-019B960494DF}">
-                <a14:hiddenLine xmlns="" xmlns:a14="http://schemas.microsoft.com/office/drawing/2010/main" w="9525">
+                <a14:hiddenLine xmlns:a14="http://schemas.microsoft.com/office/drawing/2010/main" xmlns="" w="9525">
                   <a:solidFill>
                     <a:srgbClr val="000000"/>
                   </a:solidFill>
@@ -2020,7 +2020,7 @@
             </a:ln>
             <a:extLst>
               <a:ext uri="{91240B29-F687-4f45-9708-019B960494DF}">
-                <a14:hiddenLine xmlns="" xmlns:a14="http://schemas.microsoft.com/office/drawing/2010/main" w="9525">
+                <a14:hiddenLine xmlns:a14="http://schemas.microsoft.com/office/drawing/2010/main" xmlns="" w="9525">
                   <a:solidFill>
                     <a:srgbClr val="000000"/>
                   </a:solidFill>
@@ -2088,7 +2088,7 @@
             </a:ln>
             <a:extLst>
               <a:ext uri="{91240B29-F687-4f45-9708-019B960494DF}">
-                <a14:hiddenLine xmlns="" xmlns:a14="http://schemas.microsoft.com/office/drawing/2010/main" w="9525">
+                <a14:hiddenLine xmlns:a14="http://schemas.microsoft.com/office/drawing/2010/main" xmlns="" w="9525">
                   <a:solidFill>
                     <a:srgbClr val="000000"/>
                   </a:solidFill>
@@ -2178,7 +2178,7 @@
             </a:ln>
             <a:extLst>
               <a:ext uri="{91240B29-F687-4f45-9708-019B960494DF}">
-                <a14:hiddenLine xmlns="" xmlns:a14="http://schemas.microsoft.com/office/drawing/2010/main" w="9525">
+                <a14:hiddenLine xmlns:a14="http://schemas.microsoft.com/office/drawing/2010/main" xmlns="" w="9525">
                   <a:solidFill>
                     <a:srgbClr val="000000"/>
                   </a:solidFill>
@@ -2246,7 +2246,7 @@
             </a:ln>
             <a:extLst>
               <a:ext uri="{91240B29-F687-4f45-9708-019B960494DF}">
-                <a14:hiddenLine xmlns="" xmlns:a14="http://schemas.microsoft.com/office/drawing/2010/main" w="9525">
+                <a14:hiddenLine xmlns:a14="http://schemas.microsoft.com/office/drawing/2010/main" xmlns="" w="9525">
                   <a:solidFill>
                     <a:srgbClr val="000000"/>
                   </a:solidFill>
@@ -2336,7 +2336,7 @@
             </a:ln>
             <a:extLst>
               <a:ext uri="{91240B29-F687-4f45-9708-019B960494DF}">
-                <a14:hiddenLine xmlns="" xmlns:a14="http://schemas.microsoft.com/office/drawing/2010/main" w="9525">
+                <a14:hiddenLine xmlns:a14="http://schemas.microsoft.com/office/drawing/2010/main" xmlns="" w="9525">
                   <a:solidFill>
                     <a:srgbClr val="000000"/>
                   </a:solidFill>
@@ -2370,7 +2370,7 @@
             </a:ln>
             <a:extLst>
               <a:ext uri="{91240B29-F687-4f45-9708-019B960494DF}">
-                <a14:hiddenLine xmlns="" xmlns:a14="http://schemas.microsoft.com/office/drawing/2010/main" w="9525">
+                <a14:hiddenLine xmlns:a14="http://schemas.microsoft.com/office/drawing/2010/main" xmlns="" w="9525">
                   <a:solidFill>
                     <a:srgbClr val="000000"/>
                   </a:solidFill>
@@ -2460,7 +2460,7 @@
             </a:ln>
             <a:extLst>
               <a:ext uri="{91240B29-F687-4f45-9708-019B960494DF}">
-                <a14:hiddenLine xmlns="" xmlns:a14="http://schemas.microsoft.com/office/drawing/2010/main" w="9525">
+                <a14:hiddenLine xmlns:a14="http://schemas.microsoft.com/office/drawing/2010/main" xmlns="" w="9525">
                   <a:solidFill>
                     <a:srgbClr val="000000"/>
                   </a:solidFill>
@@ -2522,7 +2522,7 @@
             </a:ln>
             <a:extLst>
               <a:ext uri="{91240B29-F687-4f45-9708-019B960494DF}">
-                <a14:hiddenLine xmlns="" xmlns:a14="http://schemas.microsoft.com/office/drawing/2010/main" w="9525">
+                <a14:hiddenLine xmlns:a14="http://schemas.microsoft.com/office/drawing/2010/main" xmlns="" w="9525">
                   <a:solidFill>
                     <a:srgbClr val="000000"/>
                   </a:solidFill>
@@ -2584,7 +2584,7 @@
             </a:ln>
             <a:extLst>
               <a:ext uri="{91240B29-F687-4f45-9708-019B960494DF}">
-                <a14:hiddenLine xmlns="" xmlns:a14="http://schemas.microsoft.com/office/drawing/2010/main" w="9525">
+                <a14:hiddenLine xmlns:a14="http://schemas.microsoft.com/office/drawing/2010/main" xmlns="" w="9525">
                   <a:solidFill>
                     <a:srgbClr val="000000"/>
                   </a:solidFill>
@@ -2674,7 +2674,7 @@
             </a:ln>
             <a:extLst>
               <a:ext uri="{91240B29-F687-4f45-9708-019B960494DF}">
-                <a14:hiddenLine xmlns="" xmlns:a14="http://schemas.microsoft.com/office/drawing/2010/main" w="9525">
+                <a14:hiddenLine xmlns:a14="http://schemas.microsoft.com/office/drawing/2010/main" xmlns="" w="9525">
                   <a:solidFill>
                     <a:srgbClr val="000000"/>
                   </a:solidFill>
@@ -2742,7 +2742,7 @@
             </a:ln>
             <a:extLst>
               <a:ext uri="{91240B29-F687-4f45-9708-019B960494DF}">
-                <a14:hiddenLine xmlns="" xmlns:a14="http://schemas.microsoft.com/office/drawing/2010/main" w="9525">
+                <a14:hiddenLine xmlns:a14="http://schemas.microsoft.com/office/drawing/2010/main" xmlns="" w="9525">
                   <a:solidFill>
                     <a:srgbClr val="000000"/>
                   </a:solidFill>
@@ -2804,7 +2804,7 @@
             </a:ln>
             <a:extLst>
               <a:ext uri="{91240B29-F687-4f45-9708-019B960494DF}">
-                <a14:hiddenLine xmlns="" xmlns:a14="http://schemas.microsoft.com/office/drawing/2010/main" w="9525">
+                <a14:hiddenLine xmlns:a14="http://schemas.microsoft.com/office/drawing/2010/main" xmlns="" w="9525">
                   <a:solidFill>
                     <a:srgbClr val="000000"/>
                   </a:solidFill>
@@ -2894,7 +2894,7 @@
             </a:ln>
             <a:extLst>
               <a:ext uri="{91240B29-F687-4f45-9708-019B960494DF}">
-                <a14:hiddenLine xmlns="" xmlns:a14="http://schemas.microsoft.com/office/drawing/2010/main" w="9525">
+                <a14:hiddenLine xmlns:a14="http://schemas.microsoft.com/office/drawing/2010/main" xmlns="" w="9525">
                   <a:solidFill>
                     <a:srgbClr val="000000"/>
                   </a:solidFill>
@@ -2956,7 +2956,7 @@
             </a:ln>
             <a:extLst>
               <a:ext uri="{91240B29-F687-4f45-9708-019B960494DF}">
-                <a14:hiddenLine xmlns="" xmlns:a14="http://schemas.microsoft.com/office/drawing/2010/main" w="9525">
+                <a14:hiddenLine xmlns:a14="http://schemas.microsoft.com/office/drawing/2010/main" xmlns="" w="9525">
                   <a:solidFill>
                     <a:srgbClr val="000000"/>
                   </a:solidFill>
@@ -3046,7 +3046,7 @@
             </a:ln>
             <a:extLst>
               <a:ext uri="{91240B29-F687-4f45-9708-019B960494DF}">
-                <a14:hiddenLine xmlns="" xmlns:a14="http://schemas.microsoft.com/office/drawing/2010/main" w="9525">
+                <a14:hiddenLine xmlns:a14="http://schemas.microsoft.com/office/drawing/2010/main" xmlns="" w="9525">
                   <a:solidFill>
                     <a:srgbClr val="000000"/>
                   </a:solidFill>
@@ -3108,7 +3108,7 @@
             </a:ln>
             <a:extLst>
               <a:ext uri="{91240B29-F687-4f45-9708-019B960494DF}">
-                <a14:hiddenLine xmlns="" xmlns:a14="http://schemas.microsoft.com/office/drawing/2010/main" w="9525">
+                <a14:hiddenLine xmlns:a14="http://schemas.microsoft.com/office/drawing/2010/main" xmlns="" w="9525">
                   <a:solidFill>
                     <a:srgbClr val="000000"/>
                   </a:solidFill>
@@ -3198,7 +3198,7 @@
             </a:ln>
             <a:extLst>
               <a:ext uri="{91240B29-F687-4f45-9708-019B960494DF}">
-                <a14:hiddenLine xmlns="" xmlns:a14="http://schemas.microsoft.com/office/drawing/2010/main" w="9525">
+                <a14:hiddenLine xmlns:a14="http://schemas.microsoft.com/office/drawing/2010/main" xmlns="" w="9525">
                   <a:solidFill>
                     <a:srgbClr val="000000"/>
                   </a:solidFill>
@@ -3232,7 +3232,7 @@
             </a:ln>
             <a:extLst>
               <a:ext uri="{91240B29-F687-4f45-9708-019B960494DF}">
-                <a14:hiddenLine xmlns="" xmlns:a14="http://schemas.microsoft.com/office/drawing/2010/main" w="9525">
+                <a14:hiddenLine xmlns:a14="http://schemas.microsoft.com/office/drawing/2010/main" xmlns="" w="9525">
                   <a:solidFill>
                     <a:srgbClr val="000000"/>
                   </a:solidFill>
@@ -3297,7 +3297,7 @@
             </a:ln>
             <a:extLst>
               <a:ext uri="{91240B29-F687-4f45-9708-019B960494DF}">
-                <a14:hiddenLine xmlns="" xmlns:a14="http://schemas.microsoft.com/office/drawing/2010/main" w="9525">
+                <a14:hiddenLine xmlns:a14="http://schemas.microsoft.com/office/drawing/2010/main" xmlns="" w="9525">
                   <a:solidFill>
                     <a:srgbClr val="000000"/>
                   </a:solidFill>
@@ -3387,7 +3387,7 @@
             </a:ln>
             <a:extLst>
               <a:ext uri="{91240B29-F687-4f45-9708-019B960494DF}">
-                <a14:hiddenLine xmlns="" xmlns:a14="http://schemas.microsoft.com/office/drawing/2010/main" w="9525">
+                <a14:hiddenLine xmlns:a14="http://schemas.microsoft.com/office/drawing/2010/main" xmlns="" w="9525">
                   <a:solidFill>
                     <a:srgbClr val="000000"/>
                   </a:solidFill>
@@ -3449,7 +3449,7 @@
             </a:ln>
             <a:extLst>
               <a:ext uri="{91240B29-F687-4f45-9708-019B960494DF}">
-                <a14:hiddenLine xmlns="" xmlns:a14="http://schemas.microsoft.com/office/drawing/2010/main" w="9525">
+                <a14:hiddenLine xmlns:a14="http://schemas.microsoft.com/office/drawing/2010/main" xmlns="" w="9525">
                   <a:solidFill>
                     <a:srgbClr val="000000"/>
                   </a:solidFill>
@@ -3539,7 +3539,7 @@
             </a:ln>
             <a:extLst>
               <a:ext uri="{91240B29-F687-4f45-9708-019B960494DF}">
-                <a14:hiddenLine xmlns="" xmlns:a14="http://schemas.microsoft.com/office/drawing/2010/main" w="9525">
+                <a14:hiddenLine xmlns:a14="http://schemas.microsoft.com/office/drawing/2010/main" xmlns="" w="9525">
                   <a:solidFill>
                     <a:srgbClr val="000000"/>
                   </a:solidFill>
@@ -3629,7 +3629,7 @@
             </a:ln>
             <a:extLst>
               <a:ext uri="{91240B29-F687-4f45-9708-019B960494DF}">
-                <a14:hiddenLine xmlns="" xmlns:a14="http://schemas.microsoft.com/office/drawing/2010/main" w="9525">
+                <a14:hiddenLine xmlns:a14="http://schemas.microsoft.com/office/drawing/2010/main" xmlns="" w="9525">
                   <a:solidFill>
                     <a:srgbClr val="000000"/>
                   </a:solidFill>
@@ -3694,7 +3694,7 @@
             </a:ln>
             <a:extLst>
               <a:ext uri="{91240B29-F687-4f45-9708-019B960494DF}">
-                <a14:hiddenLine xmlns="" xmlns:a14="http://schemas.microsoft.com/office/drawing/2010/main" w="9525">
+                <a14:hiddenLine xmlns:a14="http://schemas.microsoft.com/office/drawing/2010/main" xmlns="" w="9525">
                   <a:solidFill>
                     <a:srgbClr val="000000"/>
                   </a:solidFill>
@@ -3756,7 +3756,7 @@
             </a:ln>
             <a:extLst>
               <a:ext uri="{91240B29-F687-4f45-9708-019B960494DF}">
-                <a14:hiddenLine xmlns="" xmlns:a14="http://schemas.microsoft.com/office/drawing/2010/main" w="9525">
+                <a14:hiddenLine xmlns:a14="http://schemas.microsoft.com/office/drawing/2010/main" xmlns="" w="9525">
                   <a:solidFill>
                     <a:srgbClr val="000000"/>
                   </a:solidFill>
@@ -3846,7 +3846,7 @@
             </a:ln>
             <a:extLst>
               <a:ext uri="{91240B29-F687-4f45-9708-019B960494DF}">
-                <a14:hiddenLine xmlns="" xmlns:a14="http://schemas.microsoft.com/office/drawing/2010/main" w="9525">
+                <a14:hiddenLine xmlns:a14="http://schemas.microsoft.com/office/drawing/2010/main" xmlns="" w="9525">
                   <a:solidFill>
                     <a:srgbClr val="000000"/>
                   </a:solidFill>
@@ -3936,7 +3936,7 @@
             </a:ln>
             <a:extLst>
               <a:ext uri="{91240B29-F687-4f45-9708-019B960494DF}">
-                <a14:hiddenLine xmlns="" xmlns:a14="http://schemas.microsoft.com/office/drawing/2010/main" w="9525">
+                <a14:hiddenLine xmlns:a14="http://schemas.microsoft.com/office/drawing/2010/main" xmlns="" w="9525">
                   <a:solidFill>
                     <a:srgbClr val="000000"/>
                   </a:solidFill>
@@ -3998,7 +3998,7 @@
             </a:ln>
             <a:extLst>
               <a:ext uri="{91240B29-F687-4f45-9708-019B960494DF}">
-                <a14:hiddenLine xmlns="" xmlns:a14="http://schemas.microsoft.com/office/drawing/2010/main" w="9525">
+                <a14:hiddenLine xmlns:a14="http://schemas.microsoft.com/office/drawing/2010/main" xmlns="" w="9525">
                   <a:solidFill>
                     <a:srgbClr val="000000"/>
                   </a:solidFill>
@@ -4118,7 +4118,7 @@
             </a:ln>
             <a:extLst>
               <a:ext uri="{91240B29-F687-4f45-9708-019B960494DF}">
-                <a14:hiddenLine xmlns="" xmlns:a14="http://schemas.microsoft.com/office/drawing/2010/main" w="9525">
+                <a14:hiddenLine xmlns:a14="http://schemas.microsoft.com/office/drawing/2010/main" xmlns="" w="9525">
                   <a:solidFill>
                     <a:srgbClr val="000000"/>
                   </a:solidFill>
@@ -4186,7 +4186,7 @@
             </a:ln>
             <a:extLst>
               <a:ext uri="{91240B29-F687-4f45-9708-019B960494DF}">
-                <a14:hiddenLine xmlns="" xmlns:a14="http://schemas.microsoft.com/office/drawing/2010/main" w="9525">
+                <a14:hiddenLine xmlns:a14="http://schemas.microsoft.com/office/drawing/2010/main" xmlns="" w="9525">
                   <a:solidFill>
                     <a:srgbClr val="000000"/>
                   </a:solidFill>
@@ -4276,7 +4276,7 @@
             </a:ln>
             <a:extLst>
               <a:ext uri="{91240B29-F687-4f45-9708-019B960494DF}">
-                <a14:hiddenLine xmlns="" xmlns:a14="http://schemas.microsoft.com/office/drawing/2010/main" w="9525">
+                <a14:hiddenLine xmlns:a14="http://schemas.microsoft.com/office/drawing/2010/main" xmlns="" w="9525">
                   <a:solidFill>
                     <a:srgbClr val="000000"/>
                   </a:solidFill>
@@ -4414,7 +4414,7 @@
           <a:p>
             <a:fld id="{48A87A34-81AB-432B-8DAE-1953F412C126}" type="datetimeFigureOut">
               <a:rPr lang="en-US" dirty="0"/>
-              <a:t>6/13/2026</a:t>
+              <a:t>13-Jun-26</a:t>
             </a:fld>
             <a:endParaRPr lang="en-US"/>
           </a:p>
@@ -4674,7 +4674,7 @@
           <a:p>
             <a:fld id="{48A87A34-81AB-432B-8DAE-1953F412C126}" type="datetimeFigureOut">
               <a:rPr lang="en-US" dirty="0"/>
-              <a:t>6/13/2026</a:t>
+              <a:t>13-Jun-26</a:t>
             </a:fld>
             <a:endParaRPr lang="en-US"/>
           </a:p>
@@ -4864,7 +4864,7 @@
           <a:p>
             <a:fld id="{48A87A34-81AB-432B-8DAE-1953F412C126}" type="datetimeFigureOut">
               <a:rPr lang="en-US" dirty="0"/>
-              <a:t>6/13/2026</a:t>
+              <a:t>13-Jun-26</a:t>
             </a:fld>
             <a:endParaRPr lang="en-US"/>
           </a:p>
@@ -5121,7 +5121,7 @@
           <a:p>
             <a:fld id="{48A87A34-81AB-432B-8DAE-1953F412C126}" type="datetimeFigureOut">
               <a:rPr lang="en-US" dirty="0"/>
-              <a:t>6/13/2026</a:t>
+              <a:t>13-Jun-26</a:t>
             </a:fld>
             <a:endParaRPr lang="en-US"/>
           </a:p>
@@ -5549,7 +5549,7 @@
           <a:p>
             <a:fld id="{48A87A34-81AB-432B-8DAE-1953F412C126}" type="datetimeFigureOut">
               <a:rPr lang="en-US" dirty="0"/>
-              <a:t>6/13/2026</a:t>
+              <a:t>13-Jun-26</a:t>
             </a:fld>
             <a:endParaRPr lang="en-US"/>
           </a:p>
@@ -6089,7 +6089,7 @@
           <a:p>
             <a:fld id="{48A87A34-81AB-432B-8DAE-1953F412C126}" type="datetimeFigureOut">
               <a:rPr lang="en-US" dirty="0"/>
-              <a:t>6/13/2026</a:t>
+              <a:t>13-Jun-26</a:t>
             </a:fld>
             <a:endParaRPr lang="en-US"/>
           </a:p>
@@ -6800,7 +6800,7 @@
           <a:p>
             <a:fld id="{48A87A34-81AB-432B-8DAE-1953F412C126}" type="datetimeFigureOut">
               <a:rPr lang="en-US" dirty="0"/>
-              <a:t>6/13/2026</a:t>
+              <a:t>13-Jun-26</a:t>
             </a:fld>
             <a:endParaRPr lang="en-US"/>
           </a:p>
@@ -6963,7 +6963,7 @@
           <a:p>
             <a:fld id="{48A87A34-81AB-432B-8DAE-1953F412C126}" type="datetimeFigureOut">
               <a:rPr lang="en-US" dirty="0"/>
-              <a:t>6/13/2026</a:t>
+              <a:t>13-Jun-26</a:t>
             </a:fld>
             <a:endParaRPr lang="en-US"/>
           </a:p>
@@ -7136,7 +7136,7 @@
           <a:p>
             <a:fld id="{48A87A34-81AB-432B-8DAE-1953F412C126}" type="datetimeFigureOut">
               <a:rPr lang="en-US" dirty="0"/>
-              <a:t>6/13/2026</a:t>
+              <a:t>13-Jun-26</a:t>
             </a:fld>
             <a:endParaRPr lang="en-US"/>
           </a:p>
@@ -7299,7 +7299,7 @@
           <a:p>
             <a:fld id="{48A87A34-81AB-432B-8DAE-1953F412C126}" type="datetimeFigureOut">
               <a:rPr lang="en-US" dirty="0"/>
-              <a:t>6/13/2026</a:t>
+              <a:t>13-Jun-26</a:t>
             </a:fld>
             <a:endParaRPr lang="en-US"/>
           </a:p>
@@ -7543,7 +7543,7 @@
           <a:p>
             <a:fld id="{48A87A34-81AB-432B-8DAE-1953F412C126}" type="datetimeFigureOut">
               <a:rPr lang="en-US" dirty="0"/>
-              <a:t>6/13/2026</a:t>
+              <a:t>13-Jun-26</a:t>
             </a:fld>
             <a:endParaRPr lang="en-US"/>
           </a:p>
@@ -7767,7 +7767,7 @@
           <a:p>
             <a:fld id="{48A87A34-81AB-432B-8DAE-1953F412C126}" type="datetimeFigureOut">
               <a:rPr lang="en-US" dirty="0"/>
-              <a:t>6/13/2026</a:t>
+              <a:t>13-Jun-26</a:t>
             </a:fld>
             <a:endParaRPr lang="en-US"/>
           </a:p>
@@ -8140,7 +8140,7 @@
           <a:p>
             <a:fld id="{48A87A34-81AB-432B-8DAE-1953F412C126}" type="datetimeFigureOut">
               <a:rPr lang="en-US" dirty="0"/>
-              <a:t>6/13/2026</a:t>
+              <a:t>13-Jun-26</a:t>
             </a:fld>
             <a:endParaRPr lang="en-US"/>
           </a:p>
@@ -8252,7 +8252,7 @@
           <a:p>
             <a:fld id="{48A87A34-81AB-432B-8DAE-1953F412C126}" type="datetimeFigureOut">
               <a:rPr lang="en-US" dirty="0"/>
-              <a:t>6/13/2026</a:t>
+              <a:t>13-Jun-26</a:t>
             </a:fld>
             <a:endParaRPr lang="en-US"/>
           </a:p>
@@ -8342,7 +8342,7 @@
           <a:p>
             <a:fld id="{48A87A34-81AB-432B-8DAE-1953F412C126}" type="datetimeFigureOut">
               <a:rPr lang="en-US" dirty="0"/>
-              <a:t>6/13/2026</a:t>
+              <a:t>13-Jun-26</a:t>
             </a:fld>
             <a:endParaRPr lang="en-US"/>
           </a:p>
@@ -8584,7 +8584,7 @@
           <a:p>
             <a:fld id="{48A87A34-81AB-432B-8DAE-1953F412C126}" type="datetimeFigureOut">
               <a:rPr lang="en-US" dirty="0"/>
-              <a:t>6/13/2026</a:t>
+              <a:t>13-Jun-26</a:t>
             </a:fld>
             <a:endParaRPr lang="en-US"/>
           </a:p>
@@ -8857,7 +8857,7 @@
           <a:p>
             <a:fld id="{48A87A34-81AB-432B-8DAE-1953F412C126}" type="datetimeFigureOut">
               <a:rPr lang="en-US" dirty="0"/>
-              <a:t>6/13/2026</a:t>
+              <a:t>13-Jun-26</a:t>
             </a:fld>
             <a:endParaRPr lang="en-US"/>
           </a:p>
@@ -8968,7 +8968,7 @@
           <a:noFill/>
           <a:extLst>
             <a:ext uri="{909E8E84-426E-40dd-AFC4-6F175D3DCCD1}">
-              <a14:hiddenFill xmlns="" xmlns:a14="http://schemas.microsoft.com/office/drawing/2010/main">
+              <a14:hiddenFill xmlns:a14="http://schemas.microsoft.com/office/drawing/2010/main" xmlns="">
                 <a:solidFill>
                   <a:srgbClr val="FFFFFF"/>
                 </a:solidFill>
@@ -9042,7 +9042,7 @@
               </a:ln>
               <a:extLst>
                 <a:ext uri="{91240B29-F687-4f45-9708-019B960494DF}">
-                  <a14:hiddenLine xmlns="" xmlns:a14="http://schemas.microsoft.com/office/drawing/2010/main" w="9525">
+                  <a14:hiddenLine xmlns:a14="http://schemas.microsoft.com/office/drawing/2010/main" xmlns="" w="9525">
                     <a:solidFill>
                       <a:srgbClr val="000000"/>
                     </a:solidFill>
@@ -9132,7 +9132,7 @@
               </a:ln>
               <a:extLst>
                 <a:ext uri="{91240B29-F687-4f45-9708-019B960494DF}">
-                  <a14:hiddenLine xmlns="" xmlns:a14="http://schemas.microsoft.com/office/drawing/2010/main" w="9525">
+                  <a14:hiddenLine xmlns:a14="http://schemas.microsoft.com/office/drawing/2010/main" xmlns="" w="9525">
                     <a:solidFill>
                       <a:srgbClr val="000000"/>
                     </a:solidFill>
@@ -9222,7 +9222,7 @@
               </a:ln>
               <a:extLst>
                 <a:ext uri="{91240B29-F687-4f45-9708-019B960494DF}">
-                  <a14:hiddenLine xmlns="" xmlns:a14="http://schemas.microsoft.com/office/drawing/2010/main" w="9525">
+                  <a14:hiddenLine xmlns:a14="http://schemas.microsoft.com/office/drawing/2010/main" xmlns="" w="9525">
                     <a:solidFill>
                       <a:srgbClr val="000000"/>
                     </a:solidFill>
@@ -9284,7 +9284,7 @@
               </a:ln>
               <a:extLst>
                 <a:ext uri="{91240B29-F687-4f45-9708-019B960494DF}">
-                  <a14:hiddenLine xmlns="" xmlns:a14="http://schemas.microsoft.com/office/drawing/2010/main" w="9525">
+                  <a14:hiddenLine xmlns:a14="http://schemas.microsoft.com/office/drawing/2010/main" xmlns="" w="9525">
                     <a:solidFill>
                       <a:srgbClr val="000000"/>
                     </a:solidFill>
@@ -9374,7 +9374,7 @@
               </a:ln>
               <a:extLst>
                 <a:ext uri="{91240B29-F687-4f45-9708-019B960494DF}">
-                  <a14:hiddenLine xmlns="" xmlns:a14="http://schemas.microsoft.com/office/drawing/2010/main" w="9525">
+                  <a14:hiddenLine xmlns:a14="http://schemas.microsoft.com/office/drawing/2010/main" xmlns="" w="9525">
                     <a:solidFill>
                       <a:srgbClr val="000000"/>
                     </a:solidFill>
@@ -9436,7 +9436,7 @@
               </a:ln>
               <a:extLst>
                 <a:ext uri="{91240B29-F687-4f45-9708-019B960494DF}">
-                  <a14:hiddenLine xmlns="" xmlns:a14="http://schemas.microsoft.com/office/drawing/2010/main" w="9525">
+                  <a14:hiddenLine xmlns:a14="http://schemas.microsoft.com/office/drawing/2010/main" xmlns="" w="9525">
                     <a:solidFill>
                       <a:srgbClr val="000000"/>
                     </a:solidFill>
@@ -9498,7 +9498,7 @@
               </a:ln>
               <a:extLst>
                 <a:ext uri="{91240B29-F687-4f45-9708-019B960494DF}">
-                  <a14:hiddenLine xmlns="" xmlns:a14="http://schemas.microsoft.com/office/drawing/2010/main" w="9525">
+                  <a14:hiddenLine xmlns:a14="http://schemas.microsoft.com/office/drawing/2010/main" xmlns="" w="9525">
                     <a:solidFill>
                       <a:srgbClr val="000000"/>
                     </a:solidFill>
@@ -9588,7 +9588,7 @@
               </a:ln>
               <a:extLst>
                 <a:ext uri="{91240B29-F687-4f45-9708-019B960494DF}">
-                  <a14:hiddenLine xmlns="" xmlns:a14="http://schemas.microsoft.com/office/drawing/2010/main" w="9525">
+                  <a14:hiddenLine xmlns:a14="http://schemas.microsoft.com/office/drawing/2010/main" xmlns="" w="9525">
                     <a:solidFill>
                       <a:srgbClr val="000000"/>
                     </a:solidFill>
@@ -9678,7 +9678,7 @@
               </a:ln>
               <a:extLst>
                 <a:ext uri="{91240B29-F687-4f45-9708-019B960494DF}">
-                  <a14:hiddenLine xmlns="" xmlns:a14="http://schemas.microsoft.com/office/drawing/2010/main" w="9525">
+                  <a14:hiddenLine xmlns:a14="http://schemas.microsoft.com/office/drawing/2010/main" xmlns="" w="9525">
                     <a:solidFill>
                       <a:srgbClr val="000000"/>
                     </a:solidFill>
@@ -9740,7 +9740,7 @@
               </a:ln>
               <a:extLst>
                 <a:ext uri="{91240B29-F687-4f45-9708-019B960494DF}">
-                  <a14:hiddenLine xmlns="" xmlns:a14="http://schemas.microsoft.com/office/drawing/2010/main" w="9525">
+                  <a14:hiddenLine xmlns:a14="http://schemas.microsoft.com/office/drawing/2010/main" xmlns="" w="9525">
                     <a:solidFill>
                       <a:srgbClr val="000000"/>
                     </a:solidFill>
@@ -9850,7 +9850,7 @@
               </a:ln>
               <a:extLst>
                 <a:ext uri="{91240B29-F687-4f45-9708-019B960494DF}">
-                  <a14:hiddenLine xmlns="" xmlns:a14="http://schemas.microsoft.com/office/drawing/2010/main" w="9525">
+                  <a14:hiddenLine xmlns:a14="http://schemas.microsoft.com/office/drawing/2010/main" xmlns="" w="9525">
                     <a:solidFill>
                       <a:srgbClr val="000000"/>
                     </a:solidFill>
@@ -9934,7 +9934,7 @@
               </a:ln>
               <a:extLst>
                 <a:ext uri="{91240B29-F687-4f45-9708-019B960494DF}">
-                  <a14:hiddenLine xmlns="" xmlns:a14="http://schemas.microsoft.com/office/drawing/2010/main" w="9525">
+                  <a14:hiddenLine xmlns:a14="http://schemas.microsoft.com/office/drawing/2010/main" xmlns="" w="9525">
                     <a:solidFill>
                       <a:srgbClr val="000000"/>
                     </a:solidFill>
@@ -9996,7 +9996,7 @@
               </a:ln>
               <a:extLst>
                 <a:ext uri="{91240B29-F687-4f45-9708-019B960494DF}">
-                  <a14:hiddenLine xmlns="" xmlns:a14="http://schemas.microsoft.com/office/drawing/2010/main" w="9525">
+                  <a14:hiddenLine xmlns:a14="http://schemas.microsoft.com/office/drawing/2010/main" xmlns="" w="9525">
                     <a:solidFill>
                       <a:srgbClr val="000000"/>
                     </a:solidFill>
@@ -10058,7 +10058,7 @@
               </a:ln>
               <a:extLst>
                 <a:ext uri="{91240B29-F687-4f45-9708-019B960494DF}">
-                  <a14:hiddenLine xmlns="" xmlns:a14="http://schemas.microsoft.com/office/drawing/2010/main" w="9525">
+                  <a14:hiddenLine xmlns:a14="http://schemas.microsoft.com/office/drawing/2010/main" xmlns="" w="9525">
                     <a:solidFill>
                       <a:srgbClr val="000000"/>
                     </a:solidFill>
@@ -10148,7 +10148,7 @@
               </a:ln>
               <a:extLst>
                 <a:ext uri="{91240B29-F687-4f45-9708-019B960494DF}">
-                  <a14:hiddenLine xmlns="" xmlns:a14="http://schemas.microsoft.com/office/drawing/2010/main" w="9525">
+                  <a14:hiddenLine xmlns:a14="http://schemas.microsoft.com/office/drawing/2010/main" xmlns="" w="9525">
                     <a:solidFill>
                       <a:srgbClr val="000000"/>
                     </a:solidFill>
@@ -10182,7 +10182,7 @@
               </a:ln>
               <a:extLst>
                 <a:ext uri="{91240B29-F687-4f45-9708-019B960494DF}">
-                  <a14:hiddenLine xmlns="" xmlns:a14="http://schemas.microsoft.com/office/drawing/2010/main" w="9525">
+                  <a14:hiddenLine xmlns:a14="http://schemas.microsoft.com/office/drawing/2010/main" xmlns="" w="9525">
                     <a:solidFill>
                       <a:srgbClr val="000000"/>
                     </a:solidFill>
@@ -10247,7 +10247,7 @@
               </a:ln>
               <a:extLst>
                 <a:ext uri="{91240B29-F687-4f45-9708-019B960494DF}">
-                  <a14:hiddenLine xmlns="" xmlns:a14="http://schemas.microsoft.com/office/drawing/2010/main" w="9525">
+                  <a14:hiddenLine xmlns:a14="http://schemas.microsoft.com/office/drawing/2010/main" xmlns="" w="9525">
                     <a:solidFill>
                       <a:srgbClr val="000000"/>
                     </a:solidFill>
@@ -10337,7 +10337,7 @@
               </a:ln>
               <a:extLst>
                 <a:ext uri="{91240B29-F687-4f45-9708-019B960494DF}">
-                  <a14:hiddenLine xmlns="" xmlns:a14="http://schemas.microsoft.com/office/drawing/2010/main" w="9525">
+                  <a14:hiddenLine xmlns:a14="http://schemas.microsoft.com/office/drawing/2010/main" xmlns="" w="9525">
                     <a:solidFill>
                       <a:srgbClr val="000000"/>
                     </a:solidFill>
@@ -10399,7 +10399,7 @@
               </a:ln>
               <a:extLst>
                 <a:ext uri="{91240B29-F687-4f45-9708-019B960494DF}">
-                  <a14:hiddenLine xmlns="" xmlns:a14="http://schemas.microsoft.com/office/drawing/2010/main" w="9525">
+                  <a14:hiddenLine xmlns:a14="http://schemas.microsoft.com/office/drawing/2010/main" xmlns="" w="9525">
                     <a:solidFill>
                       <a:srgbClr val="000000"/>
                     </a:solidFill>
@@ -10489,7 +10489,7 @@
               </a:ln>
               <a:extLst>
                 <a:ext uri="{91240B29-F687-4f45-9708-019B960494DF}">
-                  <a14:hiddenLine xmlns="" xmlns:a14="http://schemas.microsoft.com/office/drawing/2010/main" w="9525">
+                  <a14:hiddenLine xmlns:a14="http://schemas.microsoft.com/office/drawing/2010/main" xmlns="" w="9525">
                     <a:solidFill>
                       <a:srgbClr val="000000"/>
                     </a:solidFill>
@@ -10554,7 +10554,7 @@
               </a:ln>
               <a:extLst>
                 <a:ext uri="{91240B29-F687-4f45-9708-019B960494DF}">
-                  <a14:hiddenLine xmlns="" xmlns:a14="http://schemas.microsoft.com/office/drawing/2010/main" w="9525">
+                  <a14:hiddenLine xmlns:a14="http://schemas.microsoft.com/office/drawing/2010/main" xmlns="" w="9525">
                     <a:solidFill>
                       <a:srgbClr val="000000"/>
                     </a:solidFill>
@@ -10616,7 +10616,7 @@
               </a:ln>
               <a:extLst>
                 <a:ext uri="{91240B29-F687-4f45-9708-019B960494DF}">
-                  <a14:hiddenLine xmlns="" xmlns:a14="http://schemas.microsoft.com/office/drawing/2010/main" w="9525">
+                  <a14:hiddenLine xmlns:a14="http://schemas.microsoft.com/office/drawing/2010/main" xmlns="" w="9525">
                     <a:solidFill>
                       <a:srgbClr val="000000"/>
                     </a:solidFill>
@@ -10706,7 +10706,7 @@
               </a:ln>
               <a:extLst>
                 <a:ext uri="{91240B29-F687-4f45-9708-019B960494DF}">
-                  <a14:hiddenLine xmlns="" xmlns:a14="http://schemas.microsoft.com/office/drawing/2010/main" w="9525">
+                  <a14:hiddenLine xmlns:a14="http://schemas.microsoft.com/office/drawing/2010/main" xmlns="" w="9525">
                     <a:solidFill>
                       <a:srgbClr val="000000"/>
                     </a:solidFill>
@@ -10796,7 +10796,7 @@
               </a:ln>
               <a:extLst>
                 <a:ext uri="{91240B29-F687-4f45-9708-019B960494DF}">
-                  <a14:hiddenLine xmlns="" xmlns:a14="http://schemas.microsoft.com/office/drawing/2010/main" w="9525">
+                  <a14:hiddenLine xmlns:a14="http://schemas.microsoft.com/office/drawing/2010/main" xmlns="" w="9525">
                     <a:solidFill>
                       <a:srgbClr val="000000"/>
                     </a:solidFill>
@@ -10861,7 +10861,7 @@
               </a:ln>
               <a:extLst>
                 <a:ext uri="{91240B29-F687-4f45-9708-019B960494DF}">
-                  <a14:hiddenLine xmlns="" xmlns:a14="http://schemas.microsoft.com/office/drawing/2010/main" w="9525">
+                  <a14:hiddenLine xmlns:a14="http://schemas.microsoft.com/office/drawing/2010/main" xmlns="" w="9525">
                     <a:solidFill>
                       <a:srgbClr val="000000"/>
                     </a:solidFill>
@@ -10981,7 +10981,7 @@
               </a:ln>
               <a:extLst>
                 <a:ext uri="{91240B29-F687-4f45-9708-019B960494DF}">
-                  <a14:hiddenLine xmlns="" xmlns:a14="http://schemas.microsoft.com/office/drawing/2010/main" w="9525">
+                  <a14:hiddenLine xmlns:a14="http://schemas.microsoft.com/office/drawing/2010/main" xmlns="" w="9525">
                     <a:solidFill>
                       <a:srgbClr val="000000"/>
                     </a:solidFill>
@@ -11079,7 +11079,7 @@
               </a:ln>
               <a:extLst>
                 <a:ext uri="{91240B29-F687-4f45-9708-019B960494DF}">
-                  <a14:hiddenLine xmlns="" xmlns:a14="http://schemas.microsoft.com/office/drawing/2010/main" w="9525">
+                  <a14:hiddenLine xmlns:a14="http://schemas.microsoft.com/office/drawing/2010/main" xmlns="" w="9525">
                     <a:solidFill>
                       <a:srgbClr val="000000"/>
                     </a:solidFill>
@@ -11194,7 +11194,7 @@
               </a:ln>
               <a:extLst>
                 <a:ext uri="{91240B29-F687-4f45-9708-019B960494DF}">
-                  <a14:hiddenLine xmlns="" xmlns:a14="http://schemas.microsoft.com/office/drawing/2010/main" w="9525">
+                  <a14:hiddenLine xmlns:a14="http://schemas.microsoft.com/office/drawing/2010/main" xmlns="" w="9525">
                     <a:solidFill>
                       <a:srgbClr val="000000"/>
                     </a:solidFill>
@@ -11284,7 +11284,7 @@
               </a:ln>
               <a:extLst>
                 <a:ext uri="{91240B29-F687-4f45-9708-019B960494DF}">
-                  <a14:hiddenLine xmlns="" xmlns:a14="http://schemas.microsoft.com/office/drawing/2010/main" w="9525">
+                  <a14:hiddenLine xmlns:a14="http://schemas.microsoft.com/office/drawing/2010/main" xmlns="" w="9525">
                     <a:solidFill>
                       <a:srgbClr val="000000"/>
                     </a:solidFill>
@@ -11349,7 +11349,7 @@
               </a:ln>
               <a:extLst>
                 <a:ext uri="{91240B29-F687-4f45-9708-019B960494DF}">
-                  <a14:hiddenLine xmlns="" xmlns:a14="http://schemas.microsoft.com/office/drawing/2010/main" w="9525">
+                  <a14:hiddenLine xmlns:a14="http://schemas.microsoft.com/office/drawing/2010/main" xmlns="" w="9525">
                     <a:solidFill>
                       <a:srgbClr val="000000"/>
                     </a:solidFill>
@@ -11439,7 +11439,7 @@
               </a:ln>
               <a:extLst>
                 <a:ext uri="{91240B29-F687-4f45-9708-019B960494DF}">
-                  <a14:hiddenLine xmlns="" xmlns:a14="http://schemas.microsoft.com/office/drawing/2010/main" w="9525">
+                  <a14:hiddenLine xmlns:a14="http://schemas.microsoft.com/office/drawing/2010/main" xmlns="" w="9525">
                     <a:solidFill>
                       <a:srgbClr val="000000"/>
                     </a:solidFill>
@@ -11507,7 +11507,7 @@
               </a:ln>
               <a:extLst>
                 <a:ext uri="{91240B29-F687-4f45-9708-019B960494DF}">
-                  <a14:hiddenLine xmlns="" xmlns:a14="http://schemas.microsoft.com/office/drawing/2010/main" w="9525">
+                  <a14:hiddenLine xmlns:a14="http://schemas.microsoft.com/office/drawing/2010/main" xmlns="" w="9525">
                     <a:solidFill>
                       <a:srgbClr val="000000"/>
                     </a:solidFill>
@@ -11597,7 +11597,7 @@
               </a:ln>
               <a:extLst>
                 <a:ext uri="{91240B29-F687-4f45-9708-019B960494DF}">
-                  <a14:hiddenLine xmlns="" xmlns:a14="http://schemas.microsoft.com/office/drawing/2010/main" w="9525">
+                  <a14:hiddenLine xmlns:a14="http://schemas.microsoft.com/office/drawing/2010/main" xmlns="" w="9525">
                     <a:solidFill>
                       <a:srgbClr val="000000"/>
                     </a:solidFill>
@@ -11665,7 +11665,7 @@
               </a:ln>
               <a:extLst>
                 <a:ext uri="{91240B29-F687-4f45-9708-019B960494DF}">
-                  <a14:hiddenLine xmlns="" xmlns:a14="http://schemas.microsoft.com/office/drawing/2010/main" w="9525">
+                  <a14:hiddenLine xmlns:a14="http://schemas.microsoft.com/office/drawing/2010/main" xmlns="" w="9525">
                     <a:solidFill>
                       <a:srgbClr val="000000"/>
                     </a:solidFill>
@@ -11755,7 +11755,7 @@
               </a:ln>
               <a:extLst>
                 <a:ext uri="{91240B29-F687-4f45-9708-019B960494DF}">
-                  <a14:hiddenLine xmlns="" xmlns:a14="http://schemas.microsoft.com/office/drawing/2010/main" w="9525">
+                  <a14:hiddenLine xmlns:a14="http://schemas.microsoft.com/office/drawing/2010/main" xmlns="" w="9525">
                     <a:solidFill>
                       <a:srgbClr val="000000"/>
                     </a:solidFill>
@@ -11789,7 +11789,7 @@
               </a:ln>
               <a:extLst>
                 <a:ext uri="{91240B29-F687-4f45-9708-019B960494DF}">
-                  <a14:hiddenLine xmlns="" xmlns:a14="http://schemas.microsoft.com/office/drawing/2010/main" w="9525">
+                  <a14:hiddenLine xmlns:a14="http://schemas.microsoft.com/office/drawing/2010/main" xmlns="" w="9525">
                     <a:solidFill>
                       <a:srgbClr val="000000"/>
                     </a:solidFill>
@@ -11929,7 +11929,7 @@
             <a:fld id="{48A87A34-81AB-432B-8DAE-1953F412C126}" type="datetimeFigureOut">
               <a:rPr lang="en-US" dirty="0"/>
               <a:pPr/>
-              <a:t>6/13/2026</a:t>
+              <a:t>13-Jun-26</a:t>
             </a:fld>
             <a:endParaRPr lang="en-US"/>
           </a:p>
@@ -12549,10 +12549,10 @@
       </p:grpSpPr>
       <p:pic>
         <p:nvPicPr>
-          <p:cNvPr id="4" name="Content Placeholder 3" descr="A screenshot of a phone&#10;&#10;AI-generated content may be incorrect.">
+          <p:cNvPr id="10" name="Content Placeholder 9">
             <a:extLst>
               <a:ext uri="{FF2B5EF4-FFF2-40B4-BE49-F238E27FC236}">
-                <a16:creationId xmlns:a16="http://schemas.microsoft.com/office/drawing/2014/main" id="{BFB7AD94-DB34-3699-FFA4-F358015712FD}"/>
+                <a16:creationId xmlns:a16="http://schemas.microsoft.com/office/drawing/2014/main" id="{20C4DCF0-2BF8-9524-4703-7B83ADDFCB38}"/>
               </a:ext>
             </a:extLst>
           </p:cNvPr>
@@ -12571,8 +12571,8 @@
         </p:blipFill>
         <p:spPr>
           <a:xfrm>
-            <a:off x="3289571" y="4677"/>
-            <a:ext cx="5414032" cy="6610308"/>
+            <a:off x="4304267" y="-39979"/>
+            <a:ext cx="3943088" cy="6629319"/>
           </a:xfrm>
           <a:prstGeom prst="rect">
             <a:avLst/>
@@ -15851,8 +15851,8 @@
         </p:blipFill>
         <p:spPr>
           <a:xfrm>
-            <a:off x="2162343" y="3660851"/>
-            <a:ext cx="2181529" cy="657317"/>
+            <a:off x="1892012" y="3430520"/>
+            <a:ext cx="2951005" cy="889168"/>
           </a:xfrm>
           <a:prstGeom prst="rect">
             <a:avLst/>
@@ -15970,10 +15970,10 @@
       </p:sp>
       <p:pic>
         <p:nvPicPr>
-          <p:cNvPr id="7" name="Picture 6">
+          <p:cNvPr id="8" name="Picture 7">
             <a:extLst>
               <a:ext uri="{FF2B5EF4-FFF2-40B4-BE49-F238E27FC236}">
-                <a16:creationId xmlns:a16="http://schemas.microsoft.com/office/drawing/2014/main" id="{63DDF53A-7B24-B727-0F95-9C84CDFF5CA4}"/>
+                <a16:creationId xmlns:a16="http://schemas.microsoft.com/office/drawing/2014/main" id="{5D36C1EC-AE71-7DE4-E266-B4D073F4FF30}"/>
               </a:ext>
             </a:extLst>
           </p:cNvPr>
@@ -15990,8 +15990,8 @@
         </p:blipFill>
         <p:spPr>
           <a:xfrm>
-            <a:off x="6457283" y="3130538"/>
-            <a:ext cx="3572374" cy="2238687"/>
+            <a:off x="6490624" y="3264767"/>
+            <a:ext cx="3505689" cy="2200582"/>
           </a:xfrm>
           <a:prstGeom prst="rect">
             <a:avLst/>
@@ -16572,10 +16572,10 @@
       </p:sp>
       <p:pic>
         <p:nvPicPr>
-          <p:cNvPr id="3" name="Picture 2" descr="A screenshot of a computer program&#10;&#10;AI-generated content may be incorrect.">
+          <p:cNvPr id="5" name="Picture 4">
             <a:extLst>
               <a:ext uri="{FF2B5EF4-FFF2-40B4-BE49-F238E27FC236}">
-                <a16:creationId xmlns:a16="http://schemas.microsoft.com/office/drawing/2014/main" id="{AF75BA97-5EC1-D10F-BF02-4BE0684B5E3D}"/>
+                <a16:creationId xmlns:a16="http://schemas.microsoft.com/office/drawing/2014/main" id="{A14A8421-2266-2614-6E08-B8E4A3EA0092}"/>
               </a:ext>
             </a:extLst>
           </p:cNvPr>
@@ -16592,8 +16592,8 @@
         </p:blipFill>
         <p:spPr>
           <a:xfrm>
-            <a:off x="1557543" y="659027"/>
-            <a:ext cx="9488805" cy="5725298"/>
+            <a:off x="1531259" y="671873"/>
+            <a:ext cx="9126295" cy="5777196"/>
           </a:xfrm>
           <a:prstGeom prst="rect">
             <a:avLst/>
@@ -16654,7 +16654,7 @@
         </p:spPr>
         <p:txBody>
           <a:bodyPr vert="horz" lIns="91440" tIns="45720" rIns="91440" bIns="45720" rtlCol="0" anchor="t">
-            <a:normAutofit fontScale="92500" lnSpcReduction="10000"/>
+            <a:normAutofit/>
           </a:bodyPr>
           <a:lstStyle/>
           <a:p>
@@ -16810,7 +16810,7 @@
                 <a:ea typeface="+mn-lt"/>
                 <a:cs typeface="+mn-lt"/>
               </a:rPr>
-              <a:t> (0.347 → 0.081), </a:t>
+              <a:t> (0.351 → 0.087), </a:t>
             </a:r>
             <a:r>
               <a:rPr lang="en-US" dirty="0" err="1">
@@ -16846,311 +16846,6 @@
                 <a:cs typeface="+mn-lt"/>
               </a:rPr>
               <a:t>uči</a:t>
-            </a:r>
-          </a:p>
-          <a:p>
-            <a:r>
-              <a:rPr lang="en-US" b="1" dirty="0" err="1">
-                <a:ea typeface="+mn-lt"/>
-                <a:cs typeface="+mn-lt"/>
-              </a:rPr>
-              <a:t>mae</a:t>
-            </a:r>
-            <a:r>
-              <a:rPr lang="en-US" dirty="0">
-                <a:ea typeface="+mn-lt"/>
-                <a:cs typeface="+mn-lt"/>
-              </a:rPr>
-              <a:t> — </a:t>
-            </a:r>
-            <a:r>
-              <a:rPr lang="en-US" dirty="0" err="1">
-                <a:ea typeface="+mn-lt"/>
-                <a:cs typeface="+mn-lt"/>
-              </a:rPr>
-              <a:t>srednja</a:t>
-            </a:r>
-            <a:r>
-              <a:rPr lang="en-US" dirty="0">
-                <a:ea typeface="+mn-lt"/>
-                <a:cs typeface="+mn-lt"/>
-              </a:rPr>
-              <a:t> </a:t>
-            </a:r>
-            <a:r>
-              <a:rPr lang="en-US" dirty="0" err="1">
-                <a:ea typeface="+mn-lt"/>
-                <a:cs typeface="+mn-lt"/>
-              </a:rPr>
-              <a:t>apsolutna</a:t>
-            </a:r>
-            <a:r>
-              <a:rPr lang="en-US" dirty="0">
-                <a:ea typeface="+mn-lt"/>
-                <a:cs typeface="+mn-lt"/>
-              </a:rPr>
-              <a:t> </a:t>
-            </a:r>
-            <a:r>
-              <a:rPr lang="en-US" dirty="0" err="1">
-                <a:ea typeface="+mn-lt"/>
-                <a:cs typeface="+mn-lt"/>
-              </a:rPr>
-              <a:t>greška</a:t>
-            </a:r>
-            <a:r>
-              <a:rPr lang="en-US" dirty="0">
-                <a:ea typeface="+mn-lt"/>
-                <a:cs typeface="+mn-lt"/>
-              </a:rPr>
-              <a:t> </a:t>
-            </a:r>
-            <a:r>
-              <a:rPr lang="en-US" dirty="0" err="1">
-                <a:ea typeface="+mn-lt"/>
-                <a:cs typeface="+mn-lt"/>
-              </a:rPr>
-              <a:t>na</a:t>
-            </a:r>
-            <a:r>
-              <a:rPr lang="en-US" dirty="0">
-                <a:ea typeface="+mn-lt"/>
-                <a:cs typeface="+mn-lt"/>
-              </a:rPr>
-              <a:t> </a:t>
-            </a:r>
-            <a:r>
-              <a:rPr lang="en-US" b="1" dirty="0" err="1">
-                <a:ea typeface="+mn-lt"/>
-                <a:cs typeface="+mn-lt"/>
-              </a:rPr>
-              <a:t>trening</a:t>
-            </a:r>
-            <a:r>
-              <a:rPr lang="en-US" dirty="0">
-                <a:ea typeface="+mn-lt"/>
-                <a:cs typeface="+mn-lt"/>
-              </a:rPr>
-              <a:t> </a:t>
-            </a:r>
-            <a:r>
-              <a:rPr lang="en-US" dirty="0" err="1">
-                <a:ea typeface="+mn-lt"/>
-                <a:cs typeface="+mn-lt"/>
-              </a:rPr>
-              <a:t>skupu</a:t>
-            </a:r>
-            <a:r>
-              <a:rPr lang="en-US" dirty="0">
-                <a:ea typeface="+mn-lt"/>
-                <a:cs typeface="+mn-lt"/>
-              </a:rPr>
-              <a:t>; </a:t>
-            </a:r>
-            <a:r>
-              <a:rPr lang="en-US" dirty="0" err="1">
-                <a:ea typeface="+mn-lt"/>
-                <a:cs typeface="+mn-lt"/>
-              </a:rPr>
-              <a:t>pokazuje</a:t>
-            </a:r>
-            <a:r>
-              <a:rPr lang="en-US" dirty="0">
-                <a:ea typeface="+mn-lt"/>
-                <a:cs typeface="+mn-lt"/>
-              </a:rPr>
-              <a:t> </a:t>
-            </a:r>
-            <a:r>
-              <a:rPr lang="en-US" dirty="0" err="1">
-                <a:ea typeface="+mn-lt"/>
-                <a:cs typeface="+mn-lt"/>
-              </a:rPr>
-              <a:t>prosečno</a:t>
-            </a:r>
-            <a:r>
-              <a:rPr lang="en-US" dirty="0">
-                <a:ea typeface="+mn-lt"/>
-                <a:cs typeface="+mn-lt"/>
-              </a:rPr>
-              <a:t> </a:t>
-            </a:r>
-            <a:r>
-              <a:rPr lang="en-US" dirty="0" err="1">
-                <a:ea typeface="+mn-lt"/>
-                <a:cs typeface="+mn-lt"/>
-              </a:rPr>
-              <a:t>odstupanje</a:t>
-            </a:r>
-            <a:r>
-              <a:rPr lang="en-US" dirty="0">
-                <a:ea typeface="+mn-lt"/>
-                <a:cs typeface="+mn-lt"/>
-              </a:rPr>
-              <a:t> </a:t>
-            </a:r>
-            <a:r>
-              <a:rPr lang="en-US" dirty="0" err="1">
-                <a:ea typeface="+mn-lt"/>
-                <a:cs typeface="+mn-lt"/>
-              </a:rPr>
-              <a:t>predikcije</a:t>
-            </a:r>
-            <a:r>
-              <a:rPr lang="en-US" dirty="0">
-                <a:ea typeface="+mn-lt"/>
-                <a:cs typeface="+mn-lt"/>
-              </a:rPr>
-              <a:t> </a:t>
-            </a:r>
-            <a:r>
-              <a:rPr lang="en-US" dirty="0" err="1">
-                <a:ea typeface="+mn-lt"/>
-                <a:cs typeface="+mn-lt"/>
-              </a:rPr>
-              <a:t>ugla</a:t>
-            </a:r>
-            <a:r>
-              <a:rPr lang="en-US" dirty="0">
-                <a:ea typeface="+mn-lt"/>
-                <a:cs typeface="+mn-lt"/>
-              </a:rPr>
-              <a:t> u </a:t>
-            </a:r>
-            <a:r>
-              <a:rPr lang="en-US" dirty="0" err="1">
-                <a:ea typeface="+mn-lt"/>
-                <a:cs typeface="+mn-lt"/>
-              </a:rPr>
-              <a:t>radijanima</a:t>
-            </a:r>
-            <a:r>
-              <a:rPr lang="en-US" dirty="0">
-                <a:ea typeface="+mn-lt"/>
-                <a:cs typeface="+mn-lt"/>
-              </a:rPr>
-              <a:t> (0.484 → 0.223)</a:t>
-            </a:r>
-          </a:p>
-          <a:p>
-            <a:r>
-              <a:rPr lang="en-US" b="1" dirty="0" err="1">
-                <a:ea typeface="+mn-lt"/>
-                <a:cs typeface="+mn-lt"/>
-              </a:rPr>
-              <a:t>val_loss</a:t>
-            </a:r>
-            <a:r>
-              <a:rPr lang="en-US" dirty="0">
-                <a:ea typeface="+mn-lt"/>
-                <a:cs typeface="+mn-lt"/>
-              </a:rPr>
-              <a:t> — MSE </a:t>
-            </a:r>
-            <a:r>
-              <a:rPr lang="en-US" dirty="0" err="1">
-                <a:ea typeface="+mn-lt"/>
-                <a:cs typeface="+mn-lt"/>
-              </a:rPr>
-              <a:t>na</a:t>
-            </a:r>
-            <a:r>
-              <a:rPr lang="en-US" dirty="0">
-                <a:ea typeface="+mn-lt"/>
-                <a:cs typeface="+mn-lt"/>
-              </a:rPr>
-              <a:t> </a:t>
-            </a:r>
-            <a:r>
-              <a:rPr lang="en-US" b="1" dirty="0" err="1">
-                <a:ea typeface="+mn-lt"/>
-                <a:cs typeface="+mn-lt"/>
-              </a:rPr>
-              <a:t>validacionom</a:t>
-            </a:r>
-            <a:r>
-              <a:rPr lang="en-US" dirty="0">
-                <a:ea typeface="+mn-lt"/>
-                <a:cs typeface="+mn-lt"/>
-              </a:rPr>
-              <a:t> </a:t>
-            </a:r>
-            <a:r>
-              <a:rPr lang="en-US" dirty="0" err="1">
-                <a:ea typeface="+mn-lt"/>
-                <a:cs typeface="+mn-lt"/>
-              </a:rPr>
-              <a:t>skupu</a:t>
-            </a:r>
-            <a:r>
-              <a:rPr lang="en-US" dirty="0">
-                <a:ea typeface="+mn-lt"/>
-                <a:cs typeface="+mn-lt"/>
-              </a:rPr>
-              <a:t> </a:t>
-            </a:r>
-            <a:r>
-              <a:rPr lang="en-US" dirty="0" err="1">
-                <a:ea typeface="+mn-lt"/>
-                <a:cs typeface="+mn-lt"/>
-              </a:rPr>
-              <a:t>stabilizuje</a:t>
-            </a:r>
-            <a:r>
-              <a:rPr lang="en-US" dirty="0">
-                <a:ea typeface="+mn-lt"/>
-                <a:cs typeface="+mn-lt"/>
-              </a:rPr>
-              <a:t> se </a:t>
-            </a:r>
-            <a:r>
-              <a:rPr lang="en-US" dirty="0" err="1">
-                <a:ea typeface="+mn-lt"/>
-                <a:cs typeface="+mn-lt"/>
-              </a:rPr>
-              <a:t>oko</a:t>
-            </a:r>
-            <a:r>
-              <a:rPr lang="en-US" dirty="0">
-                <a:ea typeface="+mn-lt"/>
-                <a:cs typeface="+mn-lt"/>
-              </a:rPr>
-              <a:t> 0.13, bez </a:t>
-            </a:r>
-            <a:r>
-              <a:rPr lang="en-US" dirty="0" err="1">
-                <a:ea typeface="+mn-lt"/>
-                <a:cs typeface="+mn-lt"/>
-              </a:rPr>
-              <a:t>porasta</a:t>
-            </a:r>
-            <a:r>
-              <a:rPr lang="en-US" dirty="0">
-                <a:ea typeface="+mn-lt"/>
-                <a:cs typeface="+mn-lt"/>
-              </a:rPr>
-              <a:t> → </a:t>
-            </a:r>
-            <a:r>
-              <a:rPr lang="en-US" dirty="0" err="1">
-                <a:ea typeface="+mn-lt"/>
-                <a:cs typeface="+mn-lt"/>
-              </a:rPr>
-              <a:t>nema</a:t>
-            </a:r>
-            <a:r>
-              <a:rPr lang="en-US" dirty="0">
-                <a:ea typeface="+mn-lt"/>
-                <a:cs typeface="+mn-lt"/>
-              </a:rPr>
-              <a:t> </a:t>
-            </a:r>
-            <a:r>
-              <a:rPr lang="en-US" dirty="0" err="1">
-                <a:ea typeface="+mn-lt"/>
-                <a:cs typeface="+mn-lt"/>
-              </a:rPr>
-              <a:t>overfittinga</a:t>
             </a:r>
             <a:endParaRPr lang="en-US" dirty="0">
               <a:ea typeface="+mn-lt"/>
@@ -17163,20 +16858,62 @@
                 <a:ea typeface="+mn-lt"/>
                 <a:cs typeface="+mn-lt"/>
               </a:rPr>
-              <a:t>val_mae</a:t>
+              <a:t>mae</a:t>
             </a:r>
             <a:r>
               <a:rPr lang="en-US" dirty="0">
                 <a:ea typeface="+mn-lt"/>
                 <a:cs typeface="+mn-lt"/>
               </a:rPr>
-              <a:t> — MAE </a:t>
+              <a:t> — </a:t>
             </a:r>
             <a:r>
               <a:rPr lang="en-US" dirty="0" err="1">
                 <a:ea typeface="+mn-lt"/>
                 <a:cs typeface="+mn-lt"/>
               </a:rPr>
+              <a:t>srednja</a:t>
+            </a:r>
+            <a:r>
+              <a:rPr lang="en-US" dirty="0">
+                <a:ea typeface="+mn-lt"/>
+                <a:cs typeface="+mn-lt"/>
+              </a:rPr>
+              <a:t> </a:t>
+            </a:r>
+            <a:r>
+              <a:rPr lang="en-US" dirty="0" err="1">
+                <a:ea typeface="+mn-lt"/>
+                <a:cs typeface="+mn-lt"/>
+              </a:rPr>
+              <a:t>apsolutna</a:t>
+            </a:r>
+            <a:r>
+              <a:rPr lang="en-US" dirty="0">
+                <a:ea typeface="+mn-lt"/>
+                <a:cs typeface="+mn-lt"/>
+              </a:rPr>
+              <a:t> </a:t>
+            </a:r>
+            <a:r>
+              <a:rPr lang="en-US" dirty="0" err="1">
+                <a:ea typeface="+mn-lt"/>
+                <a:cs typeface="+mn-lt"/>
+              </a:rPr>
+              <a:t>greška</a:t>
+            </a:r>
+            <a:r>
+              <a:rPr lang="en-US" dirty="0">
+                <a:ea typeface="+mn-lt"/>
+                <a:cs typeface="+mn-lt"/>
+              </a:rPr>
+              <a:t> </a:t>
+            </a:r>
+            <a:r>
+              <a:rPr lang="en-US" dirty="0" err="1">
+                <a:ea typeface="+mn-lt"/>
+                <a:cs typeface="+mn-lt"/>
+              </a:rPr>
               <a:t>na</a:t>
             </a:r>
             <a:r>
@@ -17191,6 +16928,148 @@
                 <a:ea typeface="+mn-lt"/>
                 <a:cs typeface="+mn-lt"/>
               </a:rPr>
+              <a:t>trening</a:t>
+            </a:r>
+            <a:r>
+              <a:rPr lang="en-US" dirty="0">
+                <a:ea typeface="+mn-lt"/>
+                <a:cs typeface="+mn-lt"/>
+              </a:rPr>
+              <a:t> </a:t>
+            </a:r>
+            <a:r>
+              <a:rPr lang="en-US" dirty="0" err="1">
+                <a:ea typeface="+mn-lt"/>
+                <a:cs typeface="+mn-lt"/>
+              </a:rPr>
+              <a:t>skupu</a:t>
+            </a:r>
+            <a:r>
+              <a:rPr lang="en-US" dirty="0">
+                <a:ea typeface="+mn-lt"/>
+                <a:cs typeface="+mn-lt"/>
+              </a:rPr>
+              <a:t>; </a:t>
+            </a:r>
+            <a:r>
+              <a:rPr lang="en-US" dirty="0" err="1">
+                <a:ea typeface="+mn-lt"/>
+                <a:cs typeface="+mn-lt"/>
+              </a:rPr>
+              <a:t>pokazuje</a:t>
+            </a:r>
+            <a:r>
+              <a:rPr lang="en-US" dirty="0">
+                <a:ea typeface="+mn-lt"/>
+                <a:cs typeface="+mn-lt"/>
+              </a:rPr>
+              <a:t> </a:t>
+            </a:r>
+            <a:r>
+              <a:rPr lang="en-US" dirty="0" err="1">
+                <a:ea typeface="+mn-lt"/>
+                <a:cs typeface="+mn-lt"/>
+              </a:rPr>
+              <a:t>prosečno</a:t>
+            </a:r>
+            <a:r>
+              <a:rPr lang="en-US" dirty="0">
+                <a:ea typeface="+mn-lt"/>
+                <a:cs typeface="+mn-lt"/>
+              </a:rPr>
+              <a:t> </a:t>
+            </a:r>
+            <a:r>
+              <a:rPr lang="en-US" dirty="0" err="1">
+                <a:ea typeface="+mn-lt"/>
+                <a:cs typeface="+mn-lt"/>
+              </a:rPr>
+              <a:t>odstupanje</a:t>
+            </a:r>
+            <a:r>
+              <a:rPr lang="en-US" dirty="0">
+                <a:ea typeface="+mn-lt"/>
+                <a:cs typeface="+mn-lt"/>
+              </a:rPr>
+              <a:t> </a:t>
+            </a:r>
+            <a:r>
+              <a:rPr lang="en-US" dirty="0" err="1">
+                <a:ea typeface="+mn-lt"/>
+                <a:cs typeface="+mn-lt"/>
+              </a:rPr>
+              <a:t>predikcije</a:t>
+            </a:r>
+            <a:r>
+              <a:rPr lang="en-US" dirty="0">
+                <a:ea typeface="+mn-lt"/>
+                <a:cs typeface="+mn-lt"/>
+              </a:rPr>
+              <a:t> </a:t>
+            </a:r>
+            <a:r>
+              <a:rPr lang="en-US" dirty="0" err="1">
+                <a:ea typeface="+mn-lt"/>
+                <a:cs typeface="+mn-lt"/>
+              </a:rPr>
+              <a:t>ugla</a:t>
+            </a:r>
+            <a:r>
+              <a:rPr lang="en-US" dirty="0">
+                <a:ea typeface="+mn-lt"/>
+                <a:cs typeface="+mn-lt"/>
+              </a:rPr>
+              <a:t> u </a:t>
+            </a:r>
+            <a:r>
+              <a:rPr lang="en-US" dirty="0" err="1">
+                <a:ea typeface="+mn-lt"/>
+                <a:cs typeface="+mn-lt"/>
+              </a:rPr>
+              <a:t>radijanima</a:t>
+            </a:r>
+            <a:r>
+              <a:rPr lang="en-US" dirty="0">
+                <a:ea typeface="+mn-lt"/>
+                <a:cs typeface="+mn-lt"/>
+              </a:rPr>
+              <a:t> (0.486 → 0.231)</a:t>
+            </a:r>
+          </a:p>
+          <a:p>
+            <a:r>
+              <a:rPr lang="en-US" b="1" dirty="0" err="1">
+                <a:ea typeface="+mn-lt"/>
+                <a:cs typeface="+mn-lt"/>
+              </a:rPr>
+              <a:t>val_loss</a:t>
+            </a:r>
+            <a:r>
+              <a:rPr lang="en-US" dirty="0">
+                <a:ea typeface="+mn-lt"/>
+                <a:cs typeface="+mn-lt"/>
+              </a:rPr>
+              <a:t> — MSE </a:t>
+            </a:r>
+            <a:r>
+              <a:rPr lang="en-US" dirty="0" err="1">
+                <a:ea typeface="+mn-lt"/>
+                <a:cs typeface="+mn-lt"/>
+              </a:rPr>
+              <a:t>na</a:t>
+            </a:r>
+            <a:r>
+              <a:rPr lang="en-US" dirty="0">
+                <a:ea typeface="+mn-lt"/>
+                <a:cs typeface="+mn-lt"/>
+              </a:rPr>
+              <a:t> </a:t>
+            </a:r>
+            <a:r>
+              <a:rPr lang="en-US" b="1" dirty="0" err="1">
+                <a:ea typeface="+mn-lt"/>
+                <a:cs typeface="+mn-lt"/>
+              </a:rPr>
               <a:t>validacionom</a:t>
             </a:r>
             <a:r>
@@ -17212,7 +17091,7 @@
                 <a:ea typeface="+mn-lt"/>
                 <a:cs typeface="+mn-lt"/>
               </a:rPr>
-              <a:t>; </a:t>
+              <a:t> </a:t>
             </a:r>
             <a:r>
               <a:rPr lang="en-US" dirty="0" err="1">
@@ -17240,70 +17119,42 @@
                 <a:ea typeface="+mn-lt"/>
                 <a:cs typeface="+mn-lt"/>
               </a:rPr>
-              <a:t> 0.28 → model u </a:t>
+              <a:t> 0.12, bez </a:t>
             </a:r>
             <a:r>
               <a:rPr lang="en-US" dirty="0" err="1">
                 <a:ea typeface="+mn-lt"/>
                 <a:cs typeface="+mn-lt"/>
               </a:rPr>
-              <a:t>proseku</a:t>
+              <a:t>porasta</a:t>
             </a:r>
             <a:r>
               <a:rPr lang="en-US" dirty="0">
                 <a:ea typeface="+mn-lt"/>
                 <a:cs typeface="+mn-lt"/>
               </a:rPr>
-              <a:t> </a:t>
+              <a:t> → </a:t>
             </a:r>
             <a:r>
               <a:rPr lang="en-US" dirty="0" err="1">
                 <a:ea typeface="+mn-lt"/>
                 <a:cs typeface="+mn-lt"/>
               </a:rPr>
-              <a:t>greši</a:t>
+              <a:t>nema</a:t>
             </a:r>
             <a:r>
               <a:rPr lang="en-US" dirty="0">
                 <a:ea typeface="+mn-lt"/>
                 <a:cs typeface="+mn-lt"/>
               </a:rPr>
-              <a:t> ~0.28 rad </a:t>
+              <a:t> </a:t>
             </a:r>
             <a:r>
               <a:rPr lang="en-US" dirty="0" err="1">
                 <a:ea typeface="+mn-lt"/>
                 <a:cs typeface="+mn-lt"/>
               </a:rPr>
-              <a:t>na</a:t>
-            </a:r>
-            <a:r>
-              <a:rPr lang="en-US" dirty="0">
-                <a:ea typeface="+mn-lt"/>
-                <a:cs typeface="+mn-lt"/>
-              </a:rPr>
-              <a:t> </a:t>
-            </a:r>
-            <a:r>
-              <a:rPr lang="en-US" dirty="0" err="1">
-                <a:ea typeface="+mn-lt"/>
-                <a:cs typeface="+mn-lt"/>
-              </a:rPr>
-              <a:t>testnim</a:t>
-            </a:r>
-            <a:r>
-              <a:rPr lang="en-US" dirty="0">
-                <a:ea typeface="+mn-lt"/>
-                <a:cs typeface="+mn-lt"/>
-              </a:rPr>
-              <a:t> </a:t>
-            </a:r>
-            <a:r>
-              <a:rPr lang="en-US" dirty="0" err="1">
-                <a:ea typeface="+mn-lt"/>
-                <a:cs typeface="+mn-lt"/>
-              </a:rPr>
-              <a:t>podacima</a:t>
+              <a:t>overfittinga</a:t>
             </a:r>
             <a:endParaRPr lang="en-US" dirty="0">
               <a:ea typeface="+mn-lt"/>
@@ -17311,6 +17162,90 @@
             </a:endParaRPr>
           </a:p>
           <a:p>
+            <a:r>
+              <a:rPr lang="en-US" b="1" dirty="0" err="1">
+                <a:ea typeface="+mn-lt"/>
+                <a:cs typeface="+mn-lt"/>
+              </a:rPr>
+              <a:t>val_mae</a:t>
+            </a:r>
+            <a:r>
+              <a:rPr lang="en-US" dirty="0">
+                <a:ea typeface="+mn-lt"/>
+                <a:cs typeface="+mn-lt"/>
+              </a:rPr>
+              <a:t> — MAE </a:t>
+            </a:r>
+            <a:r>
+              <a:rPr lang="en-US" dirty="0" err="1">
+                <a:ea typeface="+mn-lt"/>
+                <a:cs typeface="+mn-lt"/>
+              </a:rPr>
+              <a:t>na</a:t>
+            </a:r>
+            <a:r>
+              <a:rPr lang="en-US" dirty="0">
+                <a:ea typeface="+mn-lt"/>
+                <a:cs typeface="+mn-lt"/>
+              </a:rPr>
+              <a:t> </a:t>
+            </a:r>
+            <a:r>
+              <a:rPr lang="en-US" b="1" dirty="0" err="1">
+                <a:ea typeface="+mn-lt"/>
+                <a:cs typeface="+mn-lt"/>
+              </a:rPr>
+              <a:t>validacionom</a:t>
+            </a:r>
+            <a:r>
+              <a:rPr lang="en-US" dirty="0">
+                <a:ea typeface="+mn-lt"/>
+                <a:cs typeface="+mn-lt"/>
+              </a:rPr>
+              <a:t> </a:t>
+            </a:r>
+            <a:r>
+              <a:rPr lang="en-US" dirty="0" err="1">
+                <a:ea typeface="+mn-lt"/>
+                <a:cs typeface="+mn-lt"/>
+              </a:rPr>
+              <a:t>skupu</a:t>
+            </a:r>
+            <a:r>
+              <a:rPr lang="en-US" dirty="0">
+                <a:ea typeface="+mn-lt"/>
+                <a:cs typeface="+mn-lt"/>
+              </a:rPr>
+              <a:t>; </a:t>
+            </a:r>
+            <a:r>
+              <a:rPr lang="en-US" dirty="0" err="1">
+                <a:ea typeface="+mn-lt"/>
+                <a:cs typeface="+mn-lt"/>
+              </a:rPr>
+              <a:t>stabilizuje</a:t>
+            </a:r>
+            <a:r>
+              <a:rPr lang="en-US" dirty="0">
+                <a:ea typeface="+mn-lt"/>
+                <a:cs typeface="+mn-lt"/>
+              </a:rPr>
+              <a:t> se </a:t>
+            </a:r>
+            <a:r>
+              <a:rPr lang="en-US" dirty="0" err="1">
+                <a:ea typeface="+mn-lt"/>
+                <a:cs typeface="+mn-lt"/>
+              </a:rPr>
+              <a:t>oko</a:t>
+            </a:r>
+            <a:r>
+              <a:rPr lang="en-US" dirty="0">
+                <a:ea typeface="+mn-lt"/>
+                <a:cs typeface="+mn-lt"/>
+              </a:rPr>
+              <a:t> 0.27</a:t>
+            </a:r>
             <a:endParaRPr lang="en-US" dirty="0"/>
           </a:p>
         </p:txBody>
